--- a/output_visuals/powerpoint/13a_table_trg_destinations.pptx
+++ b/output_visuals/powerpoint/13a_table_trg_destinations.pptx
@@ -2425,7 +2425,7 @@
                     <a:p>
                       <a:pPr algn="r"/>
                       <a:r>
-                        <a:t>TRG → The Nature Conservancy (Heartlands)</a:t>
+                        <a:t>TRG → Verdant → The Nature Conservancy (Heartlands)</a:t>
                       </a:r>
                     </a:p>
                   </a:txBody>
